--- a/IEP/Topic2-Assessment-IEP.pptx
+++ b/IEP/Topic2-Assessment-IEP.pptx
@@ -1740,6 +1740,40 @@
           </a:p>
         </p:txBody>
       </p:sp>
+      <p:sp>
+        <p:nvSpPr>
+          <p:cNvPr id="9" name="Slide Number 9"/>
+          <p:cNvSpPr txBox="1"/>
+          <p:nvPr/>
+        </p:nvSpPr>
+        <p:spPr>
+          <a:xfrm>
+            <a:off x="11277295" y="6611112"/>
+            <a:ext cx="685800" cy="201168"/>
+          </a:xfrm>
+          <a:prstGeom prst="rect">
+            <a:avLst/>
+          </a:prstGeom>
+          <a:noFill/>
+        </p:spPr>
+        <p:txBody>
+          <a:bodyPr wrap="none" lIns="0" tIns="0" rIns="0" bIns="0" anchor="b">
+            <a:noAutofit/>
+          </a:bodyPr>
+          <a:lstStyle/>
+          <a:p>
+            <a:pPr algn="r"/>
+            <a:fld id="{5C1A6E0B-3B1F-4D5E-9C7A-2F4B8D6E1A90}" type="slidenum">
+              <a:rPr lang="en-US" sz="1200" dirty="0">
+                <a:solidFill>
+                  <a:srgbClr val="5F6272"/>
+                </a:solidFill>
+              </a:rPr>
+              <a:t>1</a:t>
+            </a:fld>
+          </a:p>
+        </p:txBody>
+      </p:sp>
     </p:spTree>
   </p:cSld>
   <p:clrMapOvr>
@@ -2440,6 +2474,40 @@
           </a:p>
         </p:txBody>
       </p:sp>
+      <p:sp>
+        <p:nvSpPr>
+          <p:cNvPr id="9" name="Slide Number 9"/>
+          <p:cNvSpPr txBox="1"/>
+          <p:nvPr/>
+        </p:nvSpPr>
+        <p:spPr>
+          <a:xfrm>
+            <a:off x="11277295" y="6611112"/>
+            <a:ext cx="685800" cy="201168"/>
+          </a:xfrm>
+          <a:prstGeom prst="rect">
+            <a:avLst/>
+          </a:prstGeom>
+          <a:noFill/>
+        </p:spPr>
+        <p:txBody>
+          <a:bodyPr wrap="none" lIns="0" tIns="0" rIns="0" bIns="0" anchor="b">
+            <a:noAutofit/>
+          </a:bodyPr>
+          <a:lstStyle/>
+          <a:p>
+            <a:pPr algn="r"/>
+            <a:fld id="{5C1A6E0B-3B1F-4D5E-9C7A-2F4B8D6E1A90}" type="slidenum">
+              <a:rPr lang="en-US" sz="1200" dirty="0">
+                <a:solidFill>
+                  <a:srgbClr val="5F6272"/>
+                </a:solidFill>
+              </a:rPr>
+              <a:t>10</a:t>
+            </a:fld>
+          </a:p>
+        </p:txBody>
+      </p:sp>
     </p:spTree>
   </p:cSld>
   <p:clrMapOvr>
@@ -2892,6 +2960,40 @@
           </a:p>
         </p:txBody>
       </p:sp>
+      <p:sp>
+        <p:nvSpPr>
+          <p:cNvPr id="8" name="Slide Number 8"/>
+          <p:cNvSpPr txBox="1"/>
+          <p:nvPr/>
+        </p:nvSpPr>
+        <p:spPr>
+          <a:xfrm>
+            <a:off x="11277295" y="6611112"/>
+            <a:ext cx="685800" cy="201168"/>
+          </a:xfrm>
+          <a:prstGeom prst="rect">
+            <a:avLst/>
+          </a:prstGeom>
+          <a:noFill/>
+        </p:spPr>
+        <p:txBody>
+          <a:bodyPr wrap="none" lIns="0" tIns="0" rIns="0" bIns="0" anchor="b">
+            <a:noAutofit/>
+          </a:bodyPr>
+          <a:lstStyle/>
+          <a:p>
+            <a:pPr algn="r"/>
+            <a:fld id="{5C1A6E0B-3B1F-4D5E-9C7A-2F4B8D6E1A90}" type="slidenum">
+              <a:rPr lang="en-US" sz="1200" dirty="0">
+                <a:solidFill>
+                  <a:srgbClr val="5F6272"/>
+                </a:solidFill>
+              </a:rPr>
+              <a:t>11</a:t>
+            </a:fld>
+          </a:p>
+        </p:txBody>
+      </p:sp>
     </p:spTree>
   </p:cSld>
   <p:clrMapOvr>
@@ -3596,6 +3698,40 @@
           </a:p>
         </p:txBody>
       </p:sp>
+      <p:sp>
+        <p:nvSpPr>
+          <p:cNvPr id="10" name="Slide Number 10"/>
+          <p:cNvSpPr txBox="1"/>
+          <p:nvPr/>
+        </p:nvSpPr>
+        <p:spPr>
+          <a:xfrm>
+            <a:off x="11277295" y="6611112"/>
+            <a:ext cx="685800" cy="201168"/>
+          </a:xfrm>
+          <a:prstGeom prst="rect">
+            <a:avLst/>
+          </a:prstGeom>
+          <a:noFill/>
+        </p:spPr>
+        <p:txBody>
+          <a:bodyPr wrap="none" lIns="0" tIns="0" rIns="0" bIns="0" anchor="b">
+            <a:noAutofit/>
+          </a:bodyPr>
+          <a:lstStyle/>
+          <a:p>
+            <a:pPr algn="r"/>
+            <a:fld id="{5C1A6E0B-3B1F-4D5E-9C7A-2F4B8D6E1A90}" type="slidenum">
+              <a:rPr lang="en-US" sz="1200" dirty="0">
+                <a:solidFill>
+                  <a:srgbClr val="5F6272"/>
+                </a:solidFill>
+              </a:rPr>
+              <a:t>12</a:t>
+            </a:fld>
+          </a:p>
+        </p:txBody>
+      </p:sp>
     </p:spTree>
   </p:cSld>
   <p:clrMapOvr>
@@ -4564,6 +4700,40 @@
           </a:p>
         </p:txBody>
       </p:sp>
+      <p:sp>
+        <p:nvSpPr>
+          <p:cNvPr id="20" name="Slide Number 20"/>
+          <p:cNvSpPr txBox="1"/>
+          <p:nvPr/>
+        </p:nvSpPr>
+        <p:spPr>
+          <a:xfrm>
+            <a:off x="11277295" y="6611112"/>
+            <a:ext cx="685800" cy="201168"/>
+          </a:xfrm>
+          <a:prstGeom prst="rect">
+            <a:avLst/>
+          </a:prstGeom>
+          <a:noFill/>
+        </p:spPr>
+        <p:txBody>
+          <a:bodyPr wrap="none" lIns="0" tIns="0" rIns="0" bIns="0" anchor="b">
+            <a:noAutofit/>
+          </a:bodyPr>
+          <a:lstStyle/>
+          <a:p>
+            <a:pPr algn="r"/>
+            <a:fld id="{5C1A6E0B-3B1F-4D5E-9C7A-2F4B8D6E1A90}" type="slidenum">
+              <a:rPr lang="en-US" sz="1200" dirty="0">
+                <a:solidFill>
+                  <a:srgbClr val="5F6272"/>
+                </a:solidFill>
+              </a:rPr>
+              <a:t>13</a:t>
+            </a:fld>
+          </a:p>
+        </p:txBody>
+      </p:sp>
     </p:spTree>
   </p:cSld>
   <p:clrMapOvr>
@@ -5592,6 +5762,40 @@
           </a:p>
         </p:txBody>
       </p:sp>
+      <p:sp>
+        <p:nvSpPr>
+          <p:cNvPr id="20" name="Slide Number 20"/>
+          <p:cNvSpPr txBox="1"/>
+          <p:nvPr/>
+        </p:nvSpPr>
+        <p:spPr>
+          <a:xfrm>
+            <a:off x="11277295" y="6611112"/>
+            <a:ext cx="685800" cy="201168"/>
+          </a:xfrm>
+          <a:prstGeom prst="rect">
+            <a:avLst/>
+          </a:prstGeom>
+          <a:noFill/>
+        </p:spPr>
+        <p:txBody>
+          <a:bodyPr wrap="none" lIns="0" tIns="0" rIns="0" bIns="0" anchor="b">
+            <a:noAutofit/>
+          </a:bodyPr>
+          <a:lstStyle/>
+          <a:p>
+            <a:pPr algn="r"/>
+            <a:fld id="{5C1A6E0B-3B1F-4D5E-9C7A-2F4B8D6E1A90}" type="slidenum">
+              <a:rPr lang="en-US" sz="1200" dirty="0">
+                <a:solidFill>
+                  <a:srgbClr val="5F6272"/>
+                </a:solidFill>
+              </a:rPr>
+              <a:t>14</a:t>
+            </a:fld>
+          </a:p>
+        </p:txBody>
+      </p:sp>
     </p:spTree>
   </p:cSld>
   <p:clrMapOvr>
@@ -7614,6 +7818,40 @@
           </a:p>
         </p:txBody>
       </p:sp>
+      <p:sp>
+        <p:nvSpPr>
+          <p:cNvPr id="52" name="Slide Number 52"/>
+          <p:cNvSpPr txBox="1"/>
+          <p:nvPr/>
+        </p:nvSpPr>
+        <p:spPr>
+          <a:xfrm>
+            <a:off x="11277295" y="6611112"/>
+            <a:ext cx="685800" cy="201168"/>
+          </a:xfrm>
+          <a:prstGeom prst="rect">
+            <a:avLst/>
+          </a:prstGeom>
+          <a:noFill/>
+        </p:spPr>
+        <p:txBody>
+          <a:bodyPr wrap="none" lIns="0" tIns="0" rIns="0" bIns="0" anchor="b">
+            <a:noAutofit/>
+          </a:bodyPr>
+          <a:lstStyle/>
+          <a:p>
+            <a:pPr algn="r"/>
+            <a:fld id="{5C1A6E0B-3B1F-4D5E-9C7A-2F4B8D6E1A90}" type="slidenum">
+              <a:rPr lang="en-US" sz="1200" dirty="0">
+                <a:solidFill>
+                  <a:srgbClr val="5F6272"/>
+                </a:solidFill>
+              </a:rPr>
+              <a:t>15</a:t>
+            </a:fld>
+          </a:p>
+        </p:txBody>
+      </p:sp>
     </p:spTree>
   </p:cSld>
   <p:clrMapOvr>
@@ -8278,6 +8516,40 @@
           </a:p>
         </p:txBody>
       </p:sp>
+      <p:sp>
+        <p:nvSpPr>
+          <p:cNvPr id="10" name="Slide Number 10"/>
+          <p:cNvSpPr txBox="1"/>
+          <p:nvPr/>
+        </p:nvSpPr>
+        <p:spPr>
+          <a:xfrm>
+            <a:off x="11277295" y="6611112"/>
+            <a:ext cx="685800" cy="201168"/>
+          </a:xfrm>
+          <a:prstGeom prst="rect">
+            <a:avLst/>
+          </a:prstGeom>
+          <a:noFill/>
+        </p:spPr>
+        <p:txBody>
+          <a:bodyPr wrap="none" lIns="0" tIns="0" rIns="0" bIns="0" anchor="b">
+            <a:noAutofit/>
+          </a:bodyPr>
+          <a:lstStyle/>
+          <a:p>
+            <a:pPr algn="r"/>
+            <a:fld id="{5C1A6E0B-3B1F-4D5E-9C7A-2F4B8D6E1A90}" type="slidenum">
+              <a:rPr lang="en-US" sz="1200" dirty="0">
+                <a:solidFill>
+                  <a:srgbClr val="5F6272"/>
+                </a:solidFill>
+              </a:rPr>
+              <a:t>16</a:t>
+            </a:fld>
+          </a:p>
+        </p:txBody>
+      </p:sp>
     </p:spTree>
   </p:cSld>
   <p:clrMapOvr>
@@ -8630,6 +8902,40 @@
           </a:p>
         </p:txBody>
       </p:sp>
+      <p:sp>
+        <p:nvSpPr>
+          <p:cNvPr id="8" name="Slide Number 8"/>
+          <p:cNvSpPr txBox="1"/>
+          <p:nvPr/>
+        </p:nvSpPr>
+        <p:spPr>
+          <a:xfrm>
+            <a:off x="11277295" y="6611112"/>
+            <a:ext cx="685800" cy="201168"/>
+          </a:xfrm>
+          <a:prstGeom prst="rect">
+            <a:avLst/>
+          </a:prstGeom>
+          <a:noFill/>
+        </p:spPr>
+        <p:txBody>
+          <a:bodyPr wrap="none" lIns="0" tIns="0" rIns="0" bIns="0" anchor="b">
+            <a:noAutofit/>
+          </a:bodyPr>
+          <a:lstStyle/>
+          <a:p>
+            <a:pPr algn="r"/>
+            <a:fld id="{5C1A6E0B-3B1F-4D5E-9C7A-2F4B8D6E1A90}" type="slidenum">
+              <a:rPr lang="en-US" sz="1200" dirty="0">
+                <a:solidFill>
+                  <a:srgbClr val="5F6272"/>
+                </a:solidFill>
+              </a:rPr>
+              <a:t>17</a:t>
+            </a:fld>
+          </a:p>
+        </p:txBody>
+      </p:sp>
     </p:spTree>
   </p:cSld>
   <p:clrMapOvr>
@@ -10573,6 +10879,40 @@
           </a:p>
         </p:txBody>
       </p:sp>
+      <p:sp>
+        <p:nvSpPr>
+          <p:cNvPr id="22" name="Slide Number 22"/>
+          <p:cNvSpPr txBox="1"/>
+          <p:nvPr/>
+        </p:nvSpPr>
+        <p:spPr>
+          <a:xfrm>
+            <a:off x="11277295" y="6611112"/>
+            <a:ext cx="685800" cy="201168"/>
+          </a:xfrm>
+          <a:prstGeom prst="rect">
+            <a:avLst/>
+          </a:prstGeom>
+          <a:noFill/>
+        </p:spPr>
+        <p:txBody>
+          <a:bodyPr wrap="none" lIns="0" tIns="0" rIns="0" bIns="0" anchor="b">
+            <a:noAutofit/>
+          </a:bodyPr>
+          <a:lstStyle/>
+          <a:p>
+            <a:pPr algn="r"/>
+            <a:fld id="{5C1A6E0B-3B1F-4D5E-9C7A-2F4B8D6E1A90}" type="slidenum">
+              <a:rPr lang="en-US" sz="1200" dirty="0">
+                <a:solidFill>
+                  <a:srgbClr val="5F6272"/>
+                </a:solidFill>
+              </a:rPr>
+              <a:t>2</a:t>
+            </a:fld>
+          </a:p>
+        </p:txBody>
+      </p:sp>
     </p:spTree>
   </p:cSld>
   <p:clrMapOvr>
@@ -11133,6 +11473,40 @@
           </a:p>
         </p:txBody>
       </p:sp>
+      <p:sp>
+        <p:nvSpPr>
+          <p:cNvPr id="9" name="Slide Number 9"/>
+          <p:cNvSpPr txBox="1"/>
+          <p:nvPr/>
+        </p:nvSpPr>
+        <p:spPr>
+          <a:xfrm>
+            <a:off x="11277295" y="6611112"/>
+            <a:ext cx="685800" cy="201168"/>
+          </a:xfrm>
+          <a:prstGeom prst="rect">
+            <a:avLst/>
+          </a:prstGeom>
+          <a:noFill/>
+        </p:spPr>
+        <p:txBody>
+          <a:bodyPr wrap="none" lIns="0" tIns="0" rIns="0" bIns="0" anchor="b">
+            <a:noAutofit/>
+          </a:bodyPr>
+          <a:lstStyle/>
+          <a:p>
+            <a:pPr algn="r"/>
+            <a:fld id="{5C1A6E0B-3B1F-4D5E-9C7A-2F4B8D6E1A90}" type="slidenum">
+              <a:rPr lang="en-US" sz="1200" dirty="0">
+                <a:solidFill>
+                  <a:srgbClr val="5F6272"/>
+                </a:solidFill>
+              </a:rPr>
+              <a:t>3</a:t>
+            </a:fld>
+          </a:p>
+        </p:txBody>
+      </p:sp>
     </p:spTree>
   </p:cSld>
   <p:clrMapOvr>
@@ -11833,6 +12207,40 @@
           </a:p>
         </p:txBody>
       </p:sp>
+      <p:sp>
+        <p:nvSpPr>
+          <p:cNvPr id="9" name="Slide Number 9"/>
+          <p:cNvSpPr txBox="1"/>
+          <p:nvPr/>
+        </p:nvSpPr>
+        <p:spPr>
+          <a:xfrm>
+            <a:off x="11277295" y="6611112"/>
+            <a:ext cx="685800" cy="201168"/>
+          </a:xfrm>
+          <a:prstGeom prst="rect">
+            <a:avLst/>
+          </a:prstGeom>
+          <a:noFill/>
+        </p:spPr>
+        <p:txBody>
+          <a:bodyPr wrap="none" lIns="0" tIns="0" rIns="0" bIns="0" anchor="b">
+            <a:noAutofit/>
+          </a:bodyPr>
+          <a:lstStyle/>
+          <a:p>
+            <a:pPr algn="r"/>
+            <a:fld id="{5C1A6E0B-3B1F-4D5E-9C7A-2F4B8D6E1A90}" type="slidenum">
+              <a:rPr lang="en-US" sz="1200" dirty="0">
+                <a:solidFill>
+                  <a:srgbClr val="5F6272"/>
+                </a:solidFill>
+              </a:rPr>
+              <a:t>4</a:t>
+            </a:fld>
+          </a:p>
+        </p:txBody>
+      </p:sp>
     </p:spTree>
   </p:cSld>
   <p:clrMapOvr>
@@ -12425,6 +12833,40 @@
           </a:p>
         </p:txBody>
       </p:sp>
+      <p:sp>
+        <p:nvSpPr>
+          <p:cNvPr id="8" name="Slide Number 8"/>
+          <p:cNvSpPr txBox="1"/>
+          <p:nvPr/>
+        </p:nvSpPr>
+        <p:spPr>
+          <a:xfrm>
+            <a:off x="11277295" y="6611112"/>
+            <a:ext cx="685800" cy="201168"/>
+          </a:xfrm>
+          <a:prstGeom prst="rect">
+            <a:avLst/>
+          </a:prstGeom>
+          <a:noFill/>
+        </p:spPr>
+        <p:txBody>
+          <a:bodyPr wrap="none" lIns="0" tIns="0" rIns="0" bIns="0" anchor="b">
+            <a:noAutofit/>
+          </a:bodyPr>
+          <a:lstStyle/>
+          <a:p>
+            <a:pPr algn="r"/>
+            <a:fld id="{5C1A6E0B-3B1F-4D5E-9C7A-2F4B8D6E1A90}" type="slidenum">
+              <a:rPr lang="en-US" sz="1200" dirty="0">
+                <a:solidFill>
+                  <a:srgbClr val="5F6272"/>
+                </a:solidFill>
+              </a:rPr>
+              <a:t>5</a:t>
+            </a:fld>
+          </a:p>
+        </p:txBody>
+      </p:sp>
     </p:spTree>
   </p:cSld>
   <p:clrMapOvr>
@@ -14690,6 +15132,40 @@
           </a:p>
         </p:txBody>
       </p:sp>
+      <p:sp>
+        <p:nvSpPr>
+          <p:cNvPr id="58" name="Slide Number 58"/>
+          <p:cNvSpPr txBox="1"/>
+          <p:nvPr/>
+        </p:nvSpPr>
+        <p:spPr>
+          <a:xfrm>
+            <a:off x="11277295" y="6611112"/>
+            <a:ext cx="685800" cy="201168"/>
+          </a:xfrm>
+          <a:prstGeom prst="rect">
+            <a:avLst/>
+          </a:prstGeom>
+          <a:noFill/>
+        </p:spPr>
+        <p:txBody>
+          <a:bodyPr wrap="none" lIns="0" tIns="0" rIns="0" bIns="0" anchor="b">
+            <a:noAutofit/>
+          </a:bodyPr>
+          <a:lstStyle/>
+          <a:p>
+            <a:pPr algn="r"/>
+            <a:fld id="{5C1A6E0B-3B1F-4D5E-9C7A-2F4B8D6E1A90}" type="slidenum">
+              <a:rPr lang="en-US" sz="1200" dirty="0">
+                <a:solidFill>
+                  <a:srgbClr val="5F6272"/>
+                </a:solidFill>
+              </a:rPr>
+              <a:t>6</a:t>
+            </a:fld>
+          </a:p>
+        </p:txBody>
+      </p:sp>
     </p:spTree>
   </p:cSld>
   <p:clrMapOvr>
@@ -15350,6 +15826,40 @@
           </a:p>
         </p:txBody>
       </p:sp>
+      <p:sp>
+        <p:nvSpPr>
+          <p:cNvPr id="9" name="Slide Number 9"/>
+          <p:cNvSpPr txBox="1"/>
+          <p:nvPr/>
+        </p:nvSpPr>
+        <p:spPr>
+          <a:xfrm>
+            <a:off x="11277295" y="6611112"/>
+            <a:ext cx="685800" cy="201168"/>
+          </a:xfrm>
+          <a:prstGeom prst="rect">
+            <a:avLst/>
+          </a:prstGeom>
+          <a:noFill/>
+        </p:spPr>
+        <p:txBody>
+          <a:bodyPr wrap="none" lIns="0" tIns="0" rIns="0" bIns="0" anchor="b">
+            <a:noAutofit/>
+          </a:bodyPr>
+          <a:lstStyle/>
+          <a:p>
+            <a:pPr algn="r"/>
+            <a:fld id="{5C1A6E0B-3B1F-4D5E-9C7A-2F4B8D6E1A90}" type="slidenum">
+              <a:rPr lang="en-US" sz="1200" dirty="0">
+                <a:solidFill>
+                  <a:srgbClr val="5F6272"/>
+                </a:solidFill>
+              </a:rPr>
+              <a:t>7</a:t>
+            </a:fld>
+          </a:p>
+        </p:txBody>
+      </p:sp>
     </p:spTree>
   </p:cSld>
   <p:clrMapOvr>
@@ -16110,6 +16620,40 @@
           </a:p>
         </p:txBody>
       </p:sp>
+      <p:sp>
+        <p:nvSpPr>
+          <p:cNvPr id="9" name="Slide Number 9"/>
+          <p:cNvSpPr txBox="1"/>
+          <p:nvPr/>
+        </p:nvSpPr>
+        <p:spPr>
+          <a:xfrm>
+            <a:off x="11277295" y="6611112"/>
+            <a:ext cx="685800" cy="201168"/>
+          </a:xfrm>
+          <a:prstGeom prst="rect">
+            <a:avLst/>
+          </a:prstGeom>
+          <a:noFill/>
+        </p:spPr>
+        <p:txBody>
+          <a:bodyPr wrap="none" lIns="0" tIns="0" rIns="0" bIns="0" anchor="b">
+            <a:noAutofit/>
+          </a:bodyPr>
+          <a:lstStyle/>
+          <a:p>
+            <a:pPr algn="r"/>
+            <a:fld id="{5C1A6E0B-3B1F-4D5E-9C7A-2F4B8D6E1A90}" type="slidenum">
+              <a:rPr lang="en-US" sz="1200" dirty="0">
+                <a:solidFill>
+                  <a:srgbClr val="5F6272"/>
+                </a:solidFill>
+              </a:rPr>
+              <a:t>8</a:t>
+            </a:fld>
+          </a:p>
+        </p:txBody>
+      </p:sp>
     </p:spTree>
   </p:cSld>
   <p:clrMapOvr>
@@ -16579,6 +17123,40 @@
               <a:t xml:space="preserve">Topic 2 Assessment · IEP Version</a:t>
             </a:r>
             <a:endParaRPr lang="en-US" sz="1125" dirty="0"/>
+          </a:p>
+        </p:txBody>
+      </p:sp>
+      <p:sp>
+        <p:nvSpPr>
+          <p:cNvPr id="8" name="Slide Number 8"/>
+          <p:cNvSpPr txBox="1"/>
+          <p:nvPr/>
+        </p:nvSpPr>
+        <p:spPr>
+          <a:xfrm>
+            <a:off x="11277295" y="6611112"/>
+            <a:ext cx="685800" cy="201168"/>
+          </a:xfrm>
+          <a:prstGeom prst="rect">
+            <a:avLst/>
+          </a:prstGeom>
+          <a:noFill/>
+        </p:spPr>
+        <p:txBody>
+          <a:bodyPr wrap="none" lIns="0" tIns="0" rIns="0" bIns="0" anchor="b">
+            <a:noAutofit/>
+          </a:bodyPr>
+          <a:lstStyle/>
+          <a:p>
+            <a:pPr algn="r"/>
+            <a:fld id="{5C1A6E0B-3B1F-4D5E-9C7A-2F4B8D6E1A90}" type="slidenum">
+              <a:rPr lang="en-US" sz="1200" dirty="0">
+                <a:solidFill>
+                  <a:srgbClr val="5F6272"/>
+                </a:solidFill>
+              </a:rPr>
+              <a:t>9</a:t>
+            </a:fld>
           </a:p>
         </p:txBody>
       </p:sp>
